--- a/仕様書.pptx
+++ b/仕様書.pptx
@@ -3848,7 +3848,7 @@
         <p:spPr/>
         <p:txBody>
           <a:bodyPr>
-            <a:normAutofit/>
+            <a:normAutofit fontScale="92500" lnSpcReduction="10000"/>
           </a:bodyPr>
           <a:lstStyle/>
           <a:p>
@@ -3902,6 +3902,26 @@
             <a:r>
               <a:rPr kumimoji="1" lang="ja-JP" altLang="en-US" dirty="0"/>
               <a:t>を使用する。</a:t>
+            </a:r>
+            <a:endParaRPr kumimoji="1" lang="en-US" altLang="ja-JP" dirty="0"/>
+          </a:p>
+          <a:p>
+            <a:pPr marL="0" indent="0">
+              <a:buNone/>
+            </a:pPr>
+            <a:endParaRPr kumimoji="1" lang="en-US" altLang="ja-JP" dirty="0"/>
+          </a:p>
+          <a:p>
+            <a:pPr marL="0" indent="0">
+              <a:buNone/>
+            </a:pPr>
+            <a:r>
+              <a:rPr kumimoji="1" lang="en-US" altLang="ja-JP" dirty="0"/>
+              <a:t>Firebase</a:t>
+            </a:r>
+            <a:r>
+              <a:rPr kumimoji="1" lang="ja-JP" altLang="en-US"/>
+              <a:t>経由でログイン機能はできた</a:t>
             </a:r>
             <a:endParaRPr kumimoji="1" lang="en-US" altLang="ja-JP" dirty="0"/>
           </a:p>

--- a/仕様書.pptx
+++ b/仕様書.pptx
@@ -261,7 +261,7 @@
           <a:p>
             <a:fld id="{F07E596A-3FA7-46C0-A5AB-AD11BEA7438E}" type="datetimeFigureOut">
               <a:rPr kumimoji="1" lang="ja-JP" altLang="en-US" smtClean="0"/>
-              <a:t>2026/5/13</a:t>
+              <a:t>2026/5/20</a:t>
             </a:fld>
             <a:endParaRPr kumimoji="1" lang="ja-JP" altLang="en-US"/>
           </a:p>
@@ -491,7 +491,7 @@
           <a:p>
             <a:fld id="{F07E596A-3FA7-46C0-A5AB-AD11BEA7438E}" type="datetimeFigureOut">
               <a:rPr kumimoji="1" lang="ja-JP" altLang="en-US" smtClean="0"/>
-              <a:t>2026/5/13</a:t>
+              <a:t>2026/5/20</a:t>
             </a:fld>
             <a:endParaRPr kumimoji="1" lang="ja-JP" altLang="en-US"/>
           </a:p>
@@ -731,7 +731,7 @@
           <a:p>
             <a:fld id="{F07E596A-3FA7-46C0-A5AB-AD11BEA7438E}" type="datetimeFigureOut">
               <a:rPr kumimoji="1" lang="ja-JP" altLang="en-US" smtClean="0"/>
-              <a:t>2026/5/13</a:t>
+              <a:t>2026/5/20</a:t>
             </a:fld>
             <a:endParaRPr kumimoji="1" lang="ja-JP" altLang="en-US"/>
           </a:p>
@@ -961,7 +961,7 @@
           <a:p>
             <a:fld id="{F07E596A-3FA7-46C0-A5AB-AD11BEA7438E}" type="datetimeFigureOut">
               <a:rPr kumimoji="1" lang="ja-JP" altLang="en-US" smtClean="0"/>
-              <a:t>2026/5/13</a:t>
+              <a:t>2026/5/20</a:t>
             </a:fld>
             <a:endParaRPr kumimoji="1" lang="ja-JP" altLang="en-US"/>
           </a:p>
@@ -1236,7 +1236,7 @@
           <a:p>
             <a:fld id="{F07E596A-3FA7-46C0-A5AB-AD11BEA7438E}" type="datetimeFigureOut">
               <a:rPr kumimoji="1" lang="ja-JP" altLang="en-US" smtClean="0"/>
-              <a:t>2026/5/13</a:t>
+              <a:t>2026/5/20</a:t>
             </a:fld>
             <a:endParaRPr kumimoji="1" lang="ja-JP" altLang="en-US"/>
           </a:p>
@@ -1565,7 +1565,7 @@
           <a:p>
             <a:fld id="{F07E596A-3FA7-46C0-A5AB-AD11BEA7438E}" type="datetimeFigureOut">
               <a:rPr kumimoji="1" lang="ja-JP" altLang="en-US" smtClean="0"/>
-              <a:t>2026/5/13</a:t>
+              <a:t>2026/5/20</a:t>
             </a:fld>
             <a:endParaRPr kumimoji="1" lang="ja-JP" altLang="en-US"/>
           </a:p>
@@ -2041,7 +2041,7 @@
           <a:p>
             <a:fld id="{F07E596A-3FA7-46C0-A5AB-AD11BEA7438E}" type="datetimeFigureOut">
               <a:rPr kumimoji="1" lang="ja-JP" altLang="en-US" smtClean="0"/>
-              <a:t>2026/5/13</a:t>
+              <a:t>2026/5/20</a:t>
             </a:fld>
             <a:endParaRPr kumimoji="1" lang="ja-JP" altLang="en-US"/>
           </a:p>
@@ -2182,7 +2182,7 @@
           <a:p>
             <a:fld id="{F07E596A-3FA7-46C0-A5AB-AD11BEA7438E}" type="datetimeFigureOut">
               <a:rPr kumimoji="1" lang="ja-JP" altLang="en-US" smtClean="0"/>
-              <a:t>2026/5/13</a:t>
+              <a:t>2026/5/20</a:t>
             </a:fld>
             <a:endParaRPr kumimoji="1" lang="ja-JP" altLang="en-US"/>
           </a:p>
@@ -2295,7 +2295,7 @@
           <a:p>
             <a:fld id="{F07E596A-3FA7-46C0-A5AB-AD11BEA7438E}" type="datetimeFigureOut">
               <a:rPr kumimoji="1" lang="ja-JP" altLang="en-US" smtClean="0"/>
-              <a:t>2026/5/13</a:t>
+              <a:t>2026/5/20</a:t>
             </a:fld>
             <a:endParaRPr kumimoji="1" lang="ja-JP" altLang="en-US"/>
           </a:p>
@@ -2638,7 +2638,7 @@
           <a:p>
             <a:fld id="{F07E596A-3FA7-46C0-A5AB-AD11BEA7438E}" type="datetimeFigureOut">
               <a:rPr kumimoji="1" lang="ja-JP" altLang="en-US" smtClean="0"/>
-              <a:t>2026/5/13</a:t>
+              <a:t>2026/5/20</a:t>
             </a:fld>
             <a:endParaRPr kumimoji="1" lang="ja-JP" altLang="en-US"/>
           </a:p>
@@ -2926,7 +2926,7 @@
           <a:p>
             <a:fld id="{F07E596A-3FA7-46C0-A5AB-AD11BEA7438E}" type="datetimeFigureOut">
               <a:rPr kumimoji="1" lang="ja-JP" altLang="en-US" smtClean="0"/>
-              <a:t>2026/5/13</a:t>
+              <a:t>2026/5/20</a:t>
             </a:fld>
             <a:endParaRPr kumimoji="1" lang="ja-JP" altLang="en-US"/>
           </a:p>
@@ -3199,7 +3199,7 @@
           <a:p>
             <a:fld id="{F07E596A-3FA7-46C0-A5AB-AD11BEA7438E}" type="datetimeFigureOut">
               <a:rPr kumimoji="1" lang="ja-JP" altLang="en-US" smtClean="0"/>
-              <a:t>2026/5/13</a:t>
+              <a:t>2026/5/20</a:t>
             </a:fld>
             <a:endParaRPr kumimoji="1" lang="ja-JP" altLang="en-US"/>
           </a:p>
@@ -3848,7 +3848,7 @@
         <p:spPr/>
         <p:txBody>
           <a:bodyPr>
-            <a:normAutofit fontScale="92500" lnSpcReduction="10000"/>
+            <a:normAutofit fontScale="85000" lnSpcReduction="20000"/>
           </a:bodyPr>
           <a:lstStyle/>
           <a:p>
@@ -3920,7 +3920,7 @@
               <a:t>Firebase</a:t>
             </a:r>
             <a:r>
-              <a:rPr kumimoji="1" lang="ja-JP" altLang="en-US"/>
+              <a:rPr kumimoji="1" lang="ja-JP" altLang="en-US" dirty="0"/>
               <a:t>経由でログイン機能はできた</a:t>
             </a:r>
             <a:endParaRPr kumimoji="1" lang="en-US" altLang="ja-JP" dirty="0"/>
@@ -3952,8 +3952,20 @@
               <a:buNone/>
             </a:pPr>
             <a:r>
+              <a:rPr lang="en-US" altLang="ja-JP" dirty="0">
+                <a:hlinkClick r:id="rId2"/>
+              </a:rPr>
+              <a:t>https://zenn.dev/lincwell_inc/articles/ad02de2eab1543</a:t>
+            </a:r>
+            <a:endParaRPr lang="en-US" altLang="ja-JP" dirty="0"/>
+          </a:p>
+          <a:p>
+            <a:pPr marL="0" indent="0">
+              <a:buNone/>
+            </a:pPr>
+            <a:r>
               <a:rPr lang="en-US" altLang="ja-JP" dirty="0"/>
-              <a:t>https://zenn.dev/lincwell_inc/articles/ad02de2eab1543</a:t>
+              <a:t>https://zenn.dev/flutteruniv/books/flutter-textbook/viewer/make-chat</a:t>
             </a:r>
             <a:endParaRPr kumimoji="1" lang="en-US" altLang="ja-JP" dirty="0"/>
           </a:p>
